--- a/slide/themes/src/34_urban.pptx
+++ b/slide/themes/src/34_urban.pptx
@@ -10275,11 +10275,7 @@
           </a:bodyPr>
           <a:lstStyle>
             <a:lvl1pPr>
-              <a:defRPr sz="4000">
-                <a:latin typeface="Arial Black"/>
-                <a:ea typeface="Arial Black"/>
-                <a:cs typeface="Arial Black"/>
-              </a:defRPr>
+              <a:defRPr sz="4000"/>
             </a:lvl1pPr>
           </a:lstStyle>
           <a:p>
@@ -10965,13 +10961,13 @@
     </a:clrScheme>
     <a:fontScheme name="Office Theme">
       <a:majorFont>
-        <a:latin typeface="Arial"/>
-        <a:ea typeface="SimSun"/>
+        <a:latin typeface="Arial Black"/>
+        <a:ea typeface="SimHei"/>
         <a:cs typeface="Arial"/>
       </a:majorFont>
       <a:minorFont>
         <a:latin typeface="Arial"/>
-        <a:ea typeface="SimSun"/>
+        <a:ea typeface="Microsoft YaHei"/>
         <a:cs typeface="Arial"/>
       </a:minorFont>
     </a:fontScheme>
@@ -11202,13 +11198,13 @@
     </a:clrScheme>
     <a:fontScheme name="Arial">
       <a:majorFont>
-        <a:latin typeface="Arial"/>
-        <a:ea typeface="Arial"/>
+        <a:latin typeface="Arial Black"/>
+        <a:ea typeface="SimHei"/>
         <a:cs typeface="Arial"/>
       </a:majorFont>
       <a:minorFont>
         <a:latin typeface="Arial"/>
-        <a:ea typeface="Arial"/>
+        <a:ea typeface="Microsoft YaHei"/>
         <a:cs typeface="Arial"/>
       </a:minorFont>
     </a:fontScheme>

--- a/slide/themes/src/34_urban.pptx
+++ b/slide/themes/src/34_urban.pptx
@@ -536,10 +536,7 @@
             <a:pPr>
               <a:defRPr/>
             </a:pPr>
-            <a:endParaRPr lang="en-US">
-              <a:latin typeface="Arial"/>
-              <a:cs typeface="Arial"/>
-            </a:endParaRPr>
+            <a:endParaRPr lang="en-US"/>
           </a:p>
         </p:txBody>
       </p:sp>
